--- a/examples/broken_en.pptx
+++ b/examples/broken_en.pptx
@@ -3152,7 +3152,7 @@
                 </a:solidFill>
                 <a:latin typeface="Arial"/>
               </a:rPr>
-              <a:t>한국어 요약: 구독 매출이 성장을 견인</a:t>
+              <a:t>Korean summary: 구독 매출이 성장을 견인했습니다</a:t>
             </a:r>
           </a:p>
         </p:txBody>
@@ -3220,7 +3220,7 @@
                 </a:solidFill>
                 <a:ea typeface="맑은 고딕"/>
               </a:rPr>
-              <a:t>자간이 벌어진 한글 라벨</a:t>
+              <a:t>Hangul label with tracking: 자간 데모</a:t>
             </a:r>
           </a:p>
         </p:txBody>

--- a/examples/broken_en.pptx
+++ b/examples/broken_en.pptx
@@ -3131,7 +3131,7 @@
         </p:nvSpPr>
         <p:spPr>
           <a:xfrm>
-            <a:off x="731520" y="3383280"/>
+            <a:off x="731520" y="2560320"/>
             <a:ext cx="7315200" cy="457200"/>
           </a:xfrm>
           <a:prstGeom prst="rect">
@@ -3146,13 +3146,12 @@
           <a:lstStyle/>
           <a:p>
             <a:r>
-              <a:rPr sz="1400" b="0">
+              <a:rPr sz="1600" b="0">
                 <a:solidFill>
                   <a:srgbClr val="1A1A1A"/>
                 </a:solidFill>
-                <a:latin typeface="Arial"/>
               </a:rPr>
-              <a:t>Korean summary: 구독 매출이 성장을 견인했습니다</a:t>
+              <a:t>Subscriptions now account for 41% of total revenue</a:t>
             </a:r>
           </a:p>
         </p:txBody>
@@ -3194,40 +3193,6 @@
       <p:sp>
         <p:nvSpPr>
           <p:cNvPr id="5" name="TextBox 4"/>
-          <p:cNvSpPr txBox="1"/>
-          <p:nvPr/>
-        </p:nvSpPr>
-        <p:spPr>
-          <a:xfrm>
-            <a:off x="731520" y="2560320"/>
-            <a:ext cx="5486400" cy="457200"/>
-          </a:xfrm>
-          <a:prstGeom prst="rect">
-            <a:avLst/>
-          </a:prstGeom>
-          <a:noFill/>
-        </p:spPr>
-        <p:txBody>
-          <a:bodyPr wrap="square">
-            <a:spAutoFit/>
-          </a:bodyPr>
-          <a:lstStyle/>
-          <a:p>
-            <a:r>
-              <a:rPr sz="1600" b="0" spc="300">
-                <a:solidFill>
-                  <a:srgbClr val="1A1A1A"/>
-                </a:solidFill>
-                <a:ea typeface="맑은 고딕"/>
-              </a:rPr>
-              <a:t>Hangul label with tracking: 자간 데모</a:t>
-            </a:r>
-          </a:p>
-        </p:txBody>
-      </p:sp>
-      <p:sp>
-        <p:nvSpPr>
-          <p:cNvPr id="6" name="TextBox 5"/>
           <p:cNvSpPr txBox="1"/>
           <p:nvPr/>
         </p:nvSpPr>
